--- a/public/materialy/1L/6/Prezentace k hodinám/3. Formáty obrázků a komprese.pptx
+++ b/public/materialy/1L/6/Prezentace k hodinám/3. Formáty obrázků a komprese.pptx
@@ -508,17 +508,61 @@
           <a:lstStyle/>
           <a:p>
             <a:r>
-              <a:t>Cíl hodiny: Student vysvětlí rozdíl mezi ztrátovou a bezztrátovou kompresí a vybere formát podle obsahu a účelu.</a:t>
-            </a:r>
-          </a:p>
-          <a:p>
-            <a:r>
-              <a:t>Soubory: Laboratoř – komprese a formáty.html, Formáty a komprese.csv</a:t>
-            </a:r>
-          </a:p>
-          <a:p>
-            <a:r>
-              <a:t>Výstup: Vyplněné Formáty a komprese.csv a vlastní pravidlo pro výběr formátu.</a:t>
+              <a:t>NEŽ ZAZVONÍ</a:t>
+            </a:r>
+          </a:p>
+          <a:p>
+            <a:r>
+              <a:t>Otevři Laboratoř – komprese a formáty.html na projektoru. Rozdej Formáty a komprese.csv — otevře se v Excelu i v Tabulkách, ale ověř, že se rozdělí podle středníků.</a:t>
+            </a:r>
+          </a:p>
+          <a:p>
+            <a:r>
+              <a:t>Rozbal Obrázky.zip. Studenti budou porovnávat velikosti souborů ve správci souborů, takže jim ukaž, kde se velikost zobrazuje.</a:t>
+            </a:r>
+          </a:p>
+          <a:p/>
+          <a:p>
+            <a:r>
+              <a:t>NAVAZUJE NA</a:t>
+            </a:r>
+          </a:p>
+          <a:p>
+            <a:r>
+              <a:t>Hodiny 1 a 2. Rastr má pevný počet pixelů a pevnou hloubku — dnes se ptáme, jak z toho udělat rozumně velký soubor.</a:t>
+            </a:r>
+          </a:p>
+          <a:p/>
+          <a:p>
+            <a:r>
+              <a:t>CÍL HODINY</a:t>
+            </a:r>
+          </a:p>
+          <a:p>
+            <a:r>
+              <a:t>Student vysvětlí rozdíl mezi ztrátovou a bezztrátovou kompresí a vybere formát podle obsahu a účelu.</a:t>
+            </a:r>
+          </a:p>
+          <a:p/>
+          <a:p>
+            <a:r>
+              <a:t>VÝSTUP, KTERÝ VYBÍRÁŠ</a:t>
+            </a:r>
+          </a:p>
+          <a:p>
+            <a:r>
+              <a:t>Vyplněné Formáty a komprese.csv a vlastní pravidlo pro výběr formátu.</a:t>
+            </a:r>
+          </a:p>
+          <a:p/>
+          <a:p>
+            <a:r>
+              <a:t>ROZVRŽENÍ</a:t>
+            </a:r>
+          </a:p>
+          <a:p>
+            <a:r>
+              <a:t>5 min tip · 7 min výklad · 28 min práce · 5 min rozbor a exit ticket.</a:t>
             </a:r>
           </a:p>
         </p:txBody>
@@ -591,14 +635,42 @@
               <a:t>Čas: 0–5 minut.</a:t>
             </a:r>
           </a:p>
-          <a:p>
-            <a:r>
-              <a:t>Otázka pro studenty: Který soubor bude menší: fotografie jako PNG, nebo jako JPEG? A co logo?</a:t>
-            </a:r>
-          </a:p>
-          <a:p>
-            <a:r>
-              <a:t>Postup: nech studenty rozhodnout a zapsat důvod dřív, než ukážeš řešení. Neprozrazuj správnou odpověď.</a:t>
+          <a:p/>
+          <a:p>
+            <a:r>
+              <a:t>CO ŘEKNEŠ</a:t>
+            </a:r>
+          </a:p>
+          <a:p>
+            <a:r>
+              <a:t>„Dvě otázky a na obě chci tip dřív, než se kdokoli podívá do počítače. Která fotka bude menší — uložená jako PNG, nebo jako JPEG? A totéž pro logo školy.“</a:t>
+            </a:r>
+          </a:p>
+          <a:p>
+            <a:r>
+              <a:t>„Napište si obojí a ke každému jednu větu proč.“</a:t>
+            </a:r>
+          </a:p>
+          <a:p/>
+          <a:p>
+            <a:r>
+              <a:t>CO DĚLÁŠ</a:t>
+            </a:r>
+          </a:p>
+          <a:p>
+            <a:r>
+              <a:t>Nech zvednout ruku, kdo tipuje u loga JPEG. Zapiš si počet na okraj — za dvacet minut se k němu vrátíš a bude to nejsilnější moment hodiny.</a:t>
+            </a:r>
+          </a:p>
+          <a:p/>
+          <a:p>
+            <a:r>
+              <a:t>POZOR</a:t>
+            </a:r>
+          </a:p>
+          <a:p>
+            <a:r>
+              <a:t>U fotky se skoro celá třída trefí. U loga se skoro celá třída splete a to je záměr. Nenaznačuj, že je tam chyták.</a:t>
             </a:r>
           </a:p>
         </p:txBody>
@@ -668,22 +740,60 @@
           <a:lstStyle/>
           <a:p>
             <a:r>
-              <a:t>Čas: 5–12 minut.</a:t>
-            </a:r>
-          </a:p>
-          <a:p>
-            <a:r>
-              <a:t>Klíčové pojmy: Bezztrátová · Ztrátová · Podle obsahu</a:t>
-            </a:r>
-          </a:p>
-          <a:p>
-            <a:r>
-              <a:t>U loga je JPEG téměř 8× větší než PNG — a vypadá hůř.</a:t>
-            </a:r>
-          </a:p>
-          <a:p>
-            <a:r>
-              <a:t>Postup: vysvětli stručně, ověř porozuměním otázkou, nepřednášej déle než 7 minut.</a:t>
+              <a:t>Čas: 5–12 minut. Sedm minut je strop.</a:t>
+            </a:r>
+          </a:p>
+          <a:p/>
+          <a:p>
+            <a:r>
+              <a:t>CO ŘEKNEŠ</a:t>
+            </a:r>
+          </a:p>
+          <a:p>
+            <a:r>
+              <a:t>K bodu 01: „Bezztrátová komprese hledá v datech opakování a zapíše je zkráceně. Když soubor rozbalíte, dostanete přesně to, co tam bylo. Nic se neztratí. Tak funguje PNG, GIF i ZIP.“</a:t>
+            </a:r>
+          </a:p>
+          <a:p>
+            <a:r>
+              <a:t>K bodu 02: „Ztrátová komprese jde na to jinak. Řekne si: tenhle detail stejně lidské oko nepozná — a zahodí ho. Natrvalo. Zpátky ho nedostanete žádným programem. Tak funguje JPEG a WebP.“</a:t>
+            </a:r>
+          </a:p>
+          <a:p>
+            <a:r>
+              <a:t>K bodu 03: „Takže formát se nevybírá podle zvyku ani podle toho, co nabídne program jako první. Vybírá se podle toho, co je na obrázku.“</a:t>
+            </a:r>
+          </a:p>
+          <a:p>
+            <a:r>
+              <a:t>Ukaž číslo ze snímku: „U loga je JPEG skoro osmkrát větší než PNG — a přitom vypadá hůř. Za chvíli si na to sáhnete.“</a:t>
+            </a:r>
+          </a:p>
+          <a:p/>
+          <a:p>
+            <a:r>
+              <a:t>CO DĚLÁŠ</a:t>
+            </a:r>
+          </a:p>
+          <a:p>
+            <a:r>
+              <a:t>Nakresli na tabuli dva sloupce: BEZZTRÁTOVÁ (PNG, GIF, SVG) a ZTRÁTOVÁ (JPEG, WebP). Nech je tam do konce hodiny.</a:t>
+            </a:r>
+          </a:p>
+          <a:p>
+            <a:r>
+              <a:t>Ověř porozumění: „Uložím fotku jako JPEG, otevřu ji a uložím znovu jako PNG. Vrátí se ztracený detail?“ Správně ne. Kdo řekne ano, potřebuje bod 02 znovu.</a:t>
+            </a:r>
+          </a:p>
+          <a:p/>
+          <a:p>
+            <a:r>
+              <a:t>POZOR</a:t>
+            </a:r>
+          </a:p>
+          <a:p>
+            <a:r>
+              <a:t>Nezabíhej do toho, jak komprese funguje uvnitř. Stačí rozdíl „vrátí přesně původní data“ versus „něco zahodí natrvalo“.</a:t>
             </a:r>
           </a:p>
         </p:txBody>
@@ -756,29 +866,95 @@
               <a:t>Čas: 12–40 minut.</a:t>
             </a:r>
           </a:p>
-          <a:p>
-            <a:r>
-              <a:t>Soubory: Laboratoř – komprese a formáty.html, Formáty a komprese.csv</a:t>
-            </a:r>
-          </a:p>
-          <a:p>
-            <a:r>
-              <a:t>12–20 min – modul 02, klíčové je, že mezi q95 a q75 klesne velikost skoro 5× bez viditelné ztráty.</a:t>
-            </a:r>
-          </a:p>
-          <a:p>
-            <a:r>
-              <a:t>20–30 min – modul 03 a obrat pořadí u loga.</a:t>
-            </a:r>
-          </a:p>
-          <a:p>
-            <a:r>
-              <a:t>30–40 min – formulace pravidla; sbírej na tabuli.</a:t>
-            </a:r>
-          </a:p>
-          <a:p>
-            <a:r>
-              <a:t>Výstup: Vyplněné Formáty a komprese.csv a vlastní pravidlo pro výběr formátu.</a:t>
+          <a:p/>
+          <a:p>
+            <a:r>
+              <a:t>CO ŘEKNEŠ</a:t>
+            </a:r>
+          </a:p>
+          <a:p>
+            <a:r>
+              <a:t>„Otevřete laboratoř a soubor Formáty a komprese.csv. Nejdřív modul 02, pak modul 03, tabulku doplňujete průběžně.“</a:t>
+            </a:r>
+          </a:p>
+          <a:p/>
+          <a:p>
+            <a:r>
+              <a:t>12–20 MIN · MODUL 02, FOTOGRAFIE</a:t>
+            </a:r>
+          </a:p>
+          <a:p>
+            <a:r>
+              <a:t>Přepínají kvalitu JPEG od 95 dolů k 15 a sledují výřez i velikost.</a:t>
+            </a:r>
+          </a:p>
+          <a:p>
+            <a:r>
+              <a:t>Nejdůležitější zjištění hodiny: mezi kvalitou 95 a 75 spadne soubor z 256 kB na 53 kB, tedy skoro pětkrát, a na obrázku to skoro není vidět. Z 75 na 15 už soubor klesne jen na 28 kB, ale kvalita se rozpadne.</a:t>
+            </a:r>
+          </a:p>
+          <a:p>
+            <a:r>
+              <a:t>Vyslov to nahlas jako otázku: „Kde se vyplatí přestat?“ Odpověď kolem kvality 75 je celý smysl modulu.</a:t>
+            </a:r>
+          </a:p>
+          <a:p/>
+          <a:p>
+            <a:r>
+              <a:t>20–30 MIN · MODUL 03, LOGO</a:t>
+            </a:r>
+          </a:p>
+          <a:p>
+            <a:r>
+              <a:t>Tady se pořadí obrátí. logo_png.png má 5,1 kB, logo_jpeg_q95.jpg 39,6 kB — a JPEG má kolem písmen šedé skvrny.</a:t>
+            </a:r>
+          </a:p>
+          <a:p>
+            <a:r>
+              <a:t>Vrať se ke svému zápisku z úvodu: „Před dvaceti minutami tipovalo JPEG tolik a tolik z vás. Kdo teď ví proč se to obrátilo?“</a:t>
+            </a:r>
+          </a:p>
+          <a:p>
+            <a:r>
+              <a:t>Očekávané vysvětlení: ztrátová komprese je stavěná na plynulé přechody. Ostrá hrana je pro ni nejhorší možný vstup — musí ji popsat spoustou dat a stejně ji rozmaže.</a:t>
+            </a:r>
+          </a:p>
+          <a:p/>
+          <a:p>
+            <a:r>
+              <a:t>30–40 MIN · VLASTNÍ PRAVIDLO</a:t>
+            </a:r>
+          </a:p>
+          <a:p>
+            <a:r>
+              <a:t>Každý napíše jednu větu, podle které bude formát vybírat. Vyber tři a napiš je na tabuli vedle sebe.</a:t>
+            </a:r>
+          </a:p>
+          <a:p>
+            <a:r>
+              <a:t>Dobré pravidlo mluví o obsahu obrázku (přechody versus hrany a text), ne o programu nebo o zvyku.</a:t>
+            </a:r>
+          </a:p>
+          <a:p/>
+          <a:p>
+            <a:r>
+              <a:t>VÝSTUP</a:t>
+            </a:r>
+          </a:p>
+          <a:p>
+            <a:r>
+              <a:t>Vyplněné Formáty a komprese.csv a vlastní pravidlo pro výběr formátu.</a:t>
+            </a:r>
+          </a:p>
+          <a:p/>
+          <a:p>
+            <a:r>
+              <a:t>KDYŽ NENÍ ČAS</a:t>
+            </a:r>
+          </a:p>
+          <a:p>
+            <a:r>
+              <a:t>Vynech řádky s GIF a WebP. Jádro hodiny je dvojice JPEG a PNG na dvou různých motivech.</a:t>
             </a:r>
           </a:p>
         </p:txBody>
@@ -848,27 +1024,40 @@
           <a:lstStyle/>
           <a:p>
             <a:r>
-              <a:t>Průběžná kontrola. Projdi body nahlas, studenti si odškrtávají v sešitu.</a:t>
-            </a:r>
-          </a:p>
-          <a:p>
-            <a:r>
-              <a:t>• V CSV máš vyplněný sloupec ztrátová u všech řádků.</a:t>
-            </a:r>
-          </a:p>
-          <a:p>
-            <a:r>
-              <a:t>• Umíš uvést jeden případ, kdy je PNG lepší volba než JPEG.</a:t>
-            </a:r>
-          </a:p>
-          <a:p>
-            <a:r>
-              <a:t>• Napsal jsi vlastní pravidlo pro výběr formátu.</a:t>
-            </a:r>
-          </a:p>
-          <a:p>
-            <a:r>
-              <a:t>• Víš, proč nelze ztrátovou kompresi vrátit zpět.</a:t>
+              <a:t>Průběžná kontrola, zhruba 38. minuta.</a:t>
+            </a:r>
+          </a:p>
+          <a:p/>
+          <a:p>
+            <a:r>
+              <a:t>CO ŘEKNEŠ</a:t>
+            </a:r>
+          </a:p>
+          <a:p>
+            <a:r>
+              <a:t>„Než odevzdáte, projedeme čtyři věci. Odškrtávejte si je.“ Čti body nahlas a mezi nimi nech pauzu.</a:t>
+            </a:r>
+          </a:p>
+          <a:p/>
+          <a:p>
+            <a:r>
+              <a:t>CO DĚLÁŠ</a:t>
+            </a:r>
+          </a:p>
+          <a:p>
+            <a:r>
+              <a:t>Sloupec „ztrátová“ v CSV bývá nedodělaný u řádků s GIF. GIF je bezztrátový, ale má jen 256 barev — ztráta vzniká už při převodu barev, ne kompresí. Když se na to někdo zeptá, je to dobrá otázka a stojí za minutu.</a:t>
+            </a:r>
+          </a:p>
+          <a:p/>
+          <a:p>
+            <a:r>
+              <a:t>POZOR</a:t>
+            </a:r>
+          </a:p>
+          <a:p>
+            <a:r>
+              <a:t>Není to známkování, je to poslední šance práci dodělat.</a:t>
             </a:r>
           </a:p>
         </p:txBody>
@@ -938,27 +1127,55 @@
           <a:lstStyle/>
           <a:p>
             <a:r>
-              <a:t>Společný rozbor – očekávané závěry:</a:t>
-            </a:r>
-          </a:p>
-          <a:p>
-            <a:r>
-              <a:t>Ztrátová komprese: Zahodí informaci natrvalo. Opakované ukládání kvalitu dále snižuje.</a:t>
-            </a:r>
-          </a:p>
-          <a:p>
-            <a:r>
-              <a:t>Fotografie: JPEG nebo WebP. Kvalita kolem 75 bývá dobrý kompromis.</a:t>
-            </a:r>
-          </a:p>
-          <a:p>
-            <a:r>
-              <a:t>Plošná grafika: PNG nebo SVG. Ostré hrany ztrátová komprese poškodí a soubor zvětší.</a:t>
-            </a:r>
-          </a:p>
-          <a:p>
-            <a:r>
-              <a:t>Pravidlo: Plynulé přechody → ztrátová. Ostré hrany, text, průhlednost → bezztrátová.</a:t>
+              <a:t>Společný rozbor, 40–43 minut.</a:t>
+            </a:r>
+          </a:p>
+          <a:p/>
+          <a:p>
+            <a:r>
+              <a:t>CO ŘEKNEŠ</a:t>
+            </a:r>
+          </a:p>
+          <a:p>
+            <a:r>
+              <a:t>Začni tou obrácenou dvojicí: „Fotka jako PNG 290 kB, jako JPEG 53 kB. Logo jako PNG 5 kB, jako JPEG 40 kB. Jedna věta — proč?“</a:t>
+            </a:r>
+          </a:p>
+          <a:p>
+            <a:r>
+              <a:t>Pak nech studenty vyslovit čtyři závěry ze snímku a doplň jen to, co nezazní.</a:t>
+            </a:r>
+          </a:p>
+          <a:p/>
+          <a:p>
+            <a:r>
+              <a:t>OČEKÁVANÉ ZÁVĚRY</a:t>
+            </a:r>
+          </a:p>
+          <a:p>
+            <a:r>
+              <a:t>Ztrátová komprese: zahodí informaci natrvalo, opakované ukládání kvalitu dál snižuje.</a:t>
+            </a:r>
+          </a:p>
+          <a:p>
+            <a:r>
+              <a:t>Fotografie: JPEG nebo WebP, kvalita kolem 75 bývá dobrý kompromis.</a:t>
+            </a:r>
+          </a:p>
+          <a:p>
+            <a:r>
+              <a:t>Plošná grafika: PNG nebo SVG. Ostré hrany ztrátová komprese poškodí a soubor ještě zvětší.</a:t>
+            </a:r>
+          </a:p>
+          <a:p>
+            <a:r>
+              <a:t>Pravidlo: plynulé přechody → ztrátová. Ostré hrany, text, průhlednost → bezztrátová.</a:t>
+            </a:r>
+          </a:p>
+          <a:p/>
+          <a:p>
+            <a:r>
+              <a:t>POZOR</a:t>
             </a:r>
           </a:p>
           <a:p>
@@ -1033,17 +1250,45 @@
           <a:lstStyle/>
           <a:p>
             <a:r>
-              <a:t>Exit ticket: Uveď jeden obrázek, který uložíš jako JPEG, a jeden, který uložíš jako PNG. U obou napiš proč.</a:t>
-            </a:r>
-          </a:p>
-          <a:p>
-            <a:r>
-              <a:t>Sbírej individuálně. Slouží jako doklad o učení každého studenta.</a:t>
-            </a:r>
-          </a:p>
-          <a:p>
-            <a:r>
-              <a:t>Očekávaná odpověď: JPEG pro fotografii s přechody, PNG pro snímek obrazovky, logo, text nebo obrázek s průhledností.</a:t>
+              <a:t>Exit ticket, poslední dvě minuty.</a:t>
+            </a:r>
+          </a:p>
+          <a:p/>
+          <a:p>
+            <a:r>
+              <a:t>CO ŘEKNEŠ</a:t>
+            </a:r>
+          </a:p>
+          <a:p>
+            <a:r>
+              <a:t>„Každý sám. Jmenuj jeden obrázek, který uložíš jako JPEG, a jeden jako PNG, a u obou napiš proč.“</a:t>
+            </a:r>
+          </a:p>
+          <a:p/>
+          <a:p>
+            <a:r>
+              <a:t>CO DĚLÁŠ</a:t>
+            </a:r>
+          </a:p>
+          <a:p>
+            <a:r>
+              <a:t>Sbírej u dveří. Odpověď bez zdůvodnění se nepočítá — celá hodina byla o tom „proč“.</a:t>
+            </a:r>
+          </a:p>
+          <a:p/>
+          <a:p>
+            <a:r>
+              <a:t>OČEKÁVANÁ ODPOVĚĎ</a:t>
+            </a:r>
+          </a:p>
+          <a:p>
+            <a:r>
+              <a:t>JPEG pro fotografii s plynulými přechody. PNG pro snímek obrazovky, logo, text nebo obrázek s průhledností.</a:t>
+            </a:r>
+          </a:p>
+          <a:p>
+            <a:r>
+              <a:t>Snímek obrazovky je nejlepší odpověď, jakou můžeš dostat: má ostrý text i plochy a v JPEGu se rozmaže nejvíc.</a:t>
             </a:r>
           </a:p>
         </p:txBody>

--- a/public/materialy/1L/6/Prezentace k hodinám/3. Formáty obrázků a komprese.pptx
+++ b/public/materialy/1L/6/Prezentace k hodinám/3. Formáty obrázků a komprese.pptx
@@ -513,7 +513,7 @@
           </a:p>
           <a:p>
             <a:r>
-              <a:t>Otevři Laboratoř – komprese a formáty.html na projektoru. Rozdej Formáty a komprese.csv — otevře se v Excelu i v Tabulkách, ale ověř, že se rozdělí podle středníků.</a:t>
+              <a:t>Otevři Laboratoř – komprese a formáty.html na projektoru. Rozdej Formáty a komprese.csv — otevře se v Excelu i v Tabulkách, ale ověř, že se rozdělí podle středníků.</a:t>
             </a:r>
           </a:p>
           <a:p>
@@ -529,7 +529,7 @@
           </a:p>
           <a:p>
             <a:r>
-              <a:t>Hodiny 1 a 2. Rastr má pevný počet pixelů a pevnou hloubku — dnes se ptáme, jak z toho udělat rozumně velký soubor.</a:t>
+              <a:t>Hodiny 1 a 2. Rastr má pevný počet pixelů a pevnou hloubku — dnes se ptáme, jak z toho udělat rozumně velký soubor.</a:t>
             </a:r>
           </a:p>
           <a:p/>
@@ -540,7 +540,7 @@
           </a:p>
           <a:p>
             <a:r>
-              <a:t>Student vysvětlí rozdíl mezi ztrátovou a bezztrátovou kompresí a vybere formát podle obsahu a účelu.</a:t>
+              <a:t>Student vysvětlí rozdíl mezi ztrátovou a bezztrátovou kompresí a vybere formát podle obsahu a účelu.</a:t>
             </a:r>
           </a:p>
           <a:p/>
@@ -551,7 +551,7 @@
           </a:p>
           <a:p>
             <a:r>
-              <a:t>Vyplněné Formáty a komprese.csv a vlastní pravidlo pro výběr formátu.</a:t>
+              <a:t>Vyplněné Formáty a komprese.csv a vlastní pravidlo pro výběr formátu.</a:t>
             </a:r>
           </a:p>
           <a:p/>
@@ -562,7 +562,7 @@
           </a:p>
           <a:p>
             <a:r>
-              <a:t>5 min tip · 7 min výklad · 28 min práce · 5 min rozbor a exit ticket.</a:t>
+              <a:t>5 min tip · 7 min výklad · 28 min práce · 5 min rozbor a exit ticket.</a:t>
             </a:r>
           </a:p>
         </p:txBody>
@@ -643,12 +643,12 @@
           </a:p>
           <a:p>
             <a:r>
-              <a:t>„Dvě otázky a na obě chci tip dřív, než se kdokoli podívá do počítače. Která fotka bude menší — uložená jako PNG, nebo jako JPEG? A totéž pro logo školy.“</a:t>
-            </a:r>
-          </a:p>
-          <a:p>
-            <a:r>
-              <a:t>„Napište si obojí a ke každému jednu větu proč.“</a:t>
+              <a:t>„Dvě otázky a na obě chci tip dřív, než se kdokoli podívá do počítače. Která fotka bude menší — uložená jako PNG, nebo jako JPEG? A totéž pro logo školy.“</a:t>
+            </a:r>
+          </a:p>
+          <a:p>
+            <a:r>
+              <a:t>„Napište si obojí a ke každému jednu větu proč.“</a:t>
             </a:r>
           </a:p>
           <a:p/>
@@ -659,7 +659,7 @@
           </a:p>
           <a:p>
             <a:r>
-              <a:t>Nech zvednout ruku, kdo tipuje u loga JPEG. Zapiš si počet na okraj — za dvacet minut se k němu vrátíš a bude to nejsilnější moment hodiny.</a:t>
+              <a:t>Nech zvednout ruku, kdo tipuje u loga JPEG. Zapiš si počet na okraj — za dvacet minut se k němu vrátíš a bude to nejsilnější moment hodiny.</a:t>
             </a:r>
           </a:p>
           <a:p/>
@@ -670,7 +670,7 @@
           </a:p>
           <a:p>
             <a:r>
-              <a:t>U fotky se skoro celá třída trefí. U loga se skoro celá třída splete a to je záměr. Nenaznačuj, že je tam chyták.</a:t>
+              <a:t>U fotky se skoro celá třída trefí. U loga se skoro celá třída splete a to je záměr. Nenaznačuj, že je tam chyták.</a:t>
             </a:r>
           </a:p>
         </p:txBody>
@@ -751,22 +751,22 @@
           </a:p>
           <a:p>
             <a:r>
-              <a:t>K bodu 01: „Bezztrátová komprese hledá v datech opakování a zapíše je zkráceně. Když soubor rozbalíte, dostanete přesně to, co tam bylo. Nic se neztratí. Tak funguje PNG, GIF i ZIP.“</a:t>
-            </a:r>
-          </a:p>
-          <a:p>
-            <a:r>
-              <a:t>K bodu 02: „Ztrátová komprese jde na to jinak. Řekne si: tenhle detail stejně lidské oko nepozná — a zahodí ho. Natrvalo. Zpátky ho nedostanete žádným programem. Tak funguje JPEG a WebP.“</a:t>
-            </a:r>
-          </a:p>
-          <a:p>
-            <a:r>
-              <a:t>K bodu 03: „Takže formát se nevybírá podle zvyku ani podle toho, co nabídne program jako první. Vybírá se podle toho, co je na obrázku.“</a:t>
-            </a:r>
-          </a:p>
-          <a:p>
-            <a:r>
-              <a:t>Ukaž číslo ze snímku: „U loga je JPEG skoro osmkrát větší než PNG — a přitom vypadá hůř. Za chvíli si na to sáhnete.“</a:t>
+              <a:t>K bodu 01: „Bezztrátová komprese hledá v datech opakování a zapíše je zkráceně. Když soubor rozbalíte, dostanete přesně to, co tam bylo. Nic se neztratí. Tak funguje PNG, GIF i ZIP.“</a:t>
+            </a:r>
+          </a:p>
+          <a:p>
+            <a:r>
+              <a:t>K bodu 02: „Ztrátová komprese jde na to jinak. Řekne si: tenhle detail stejně lidské oko nepozná — a zahodí ho. Natrvalo. Zpátky ho nedostanete žádným programem. Tak funguje JPEG a WebP.“</a:t>
+            </a:r>
+          </a:p>
+          <a:p>
+            <a:r>
+              <a:t>K bodu 03: „Takže formát se nevybírá podle zvyku ani podle toho, co nabídne program jako první. Vybírá se podle toho, co je na obrázku.“</a:t>
+            </a:r>
+          </a:p>
+          <a:p>
+            <a:r>
+              <a:t>Ukaž číslo ze snímku: „U loga je JPEG skoro osmkrát větší než PNG — a přitom vypadá hůř. Za chvíli si na to sáhnete.“</a:t>
             </a:r>
           </a:p>
           <a:p/>
@@ -777,12 +777,12 @@
           </a:p>
           <a:p>
             <a:r>
-              <a:t>Nakresli na tabuli dva sloupce: BEZZTRÁTOVÁ (PNG, GIF, SVG) a ZTRÁTOVÁ (JPEG, WebP). Nech je tam do konce hodiny.</a:t>
-            </a:r>
-          </a:p>
-          <a:p>
-            <a:r>
-              <a:t>Ověř porozumění: „Uložím fotku jako JPEG, otevřu ji a uložím znovu jako PNG. Vrátí se ztracený detail?“ Správně ne. Kdo řekne ano, potřebuje bod 02 znovu.</a:t>
+              <a:t>Nakresli na tabuli dva sloupce: BEZZTRÁTOVÁ (PNG, GIF, SVG) a ZTRÁTOVÁ (JPEG, WebP). Nech je tam do konce hodiny.</a:t>
+            </a:r>
+          </a:p>
+          <a:p>
+            <a:r>
+              <a:t>Ověř porozumění: „Uložím fotku jako JPEG, otevřu ji a uložím znovu jako PNG. Vrátí se ztracený detail?“ Správně ne. Kdo řekne ano, potřebuje bod 02 znovu.</a:t>
             </a:r>
           </a:p>
           <a:p/>
@@ -874,7 +874,7 @@
           </a:p>
           <a:p>
             <a:r>
-              <a:t>„Otevřete laboratoř a soubor Formáty a komprese.csv. Nejdřív modul 02, pak modul 03, tabulku doplňujete průběžně.“</a:t>
+              <a:t>„Otevřete laboratoř a soubor Formáty a komprese.csv. Nejdřív modul 02, pak modul 03, tabulku doplňujete průběžně.“</a:t>
             </a:r>
           </a:p>
           <a:p/>
@@ -885,12 +885,12 @@
           </a:p>
           <a:p>
             <a:r>
-              <a:t>Přepínají kvalitu JPEG od 95 dolů k 15 a sledují výřez i velikost.</a:t>
-            </a:r>
-          </a:p>
-          <a:p>
-            <a:r>
-              <a:t>Nejdůležitější zjištění hodiny: mezi kvalitou 95 a 75 spadne soubor z 256 kB na 53 kB, tedy skoro pětkrát, a na obrázku to skoro není vidět. Z 75 na 15 už soubor klesne jen na 28 kB, ale kvalita se rozpadne.</a:t>
+              <a:t>Přepínají kvalitu JPEG od 95 dolů k 15 a sledují výřez i velikost.</a:t>
+            </a:r>
+          </a:p>
+          <a:p>
+            <a:r>
+              <a:t>Nejdůležitější zjištění hodiny: mezi kvalitou 95 a 75 spadne soubor z 256 kB na 53 kB, tedy skoro pětkrát, a na obrázku to skoro není vidět. Z 75 na 15 už soubor klesne jen na 28 kB, ale kvalita se rozpadne.</a:t>
             </a:r>
           </a:p>
           <a:p>
@@ -906,17 +906,17 @@
           </a:p>
           <a:p>
             <a:r>
-              <a:t>Tady se pořadí obrátí. logo_png.png má 5,1 kB, logo_jpeg_q95.jpg 39,6 kB — a JPEG má kolem písmen šedé skvrny.</a:t>
-            </a:r>
-          </a:p>
-          <a:p>
-            <a:r>
-              <a:t>Vrať se ke svému zápisku z úvodu: „Před dvaceti minutami tipovalo JPEG tolik a tolik z vás. Kdo teď ví proč se to obrátilo?“</a:t>
-            </a:r>
-          </a:p>
-          <a:p>
-            <a:r>
-              <a:t>Očekávané vysvětlení: ztrátová komprese je stavěná na plynulé přechody. Ostrá hrana je pro ni nejhorší možný vstup — musí ji popsat spoustou dat a stejně ji rozmaže.</a:t>
+              <a:t>Tady se pořadí obrátí. logo_png.png má 5,1 kB, logo_jpeg_q95.jpg 39,6 kB — a JPEG má kolem písmen šedé skvrny.</a:t>
+            </a:r>
+          </a:p>
+          <a:p>
+            <a:r>
+              <a:t>Vrať se ke svému zápisku z úvodu: „Před dvaceti minutami tipovalo JPEG tolik a tolik z vás. Kdo teď ví proč se to obrátilo?“</a:t>
+            </a:r>
+          </a:p>
+          <a:p>
+            <a:r>
+              <a:t>Očekávané vysvětlení: ztrátová komprese je stavěná na plynulé přechody. Ostrá hrana je pro ni nejhorší možný vstup — musí ji popsat spoustou dat a stejně ji rozmaže.</a:t>
             </a:r>
           </a:p>
           <a:p/>
@@ -927,12 +927,12 @@
           </a:p>
           <a:p>
             <a:r>
-              <a:t>Každý napíše jednu větu, podle které bude formát vybírat. Vyber tři a napiš je na tabuli vedle sebe.</a:t>
-            </a:r>
-          </a:p>
-          <a:p>
-            <a:r>
-              <a:t>Dobré pravidlo mluví o obsahu obrázku (přechody versus hrany a text), ne o programu nebo o zvyku.</a:t>
+              <a:t>Každý napíše jednu větu, podle které bude formát vybírat. Vyber tři a napiš je na tabuli vedle sebe.</a:t>
+            </a:r>
+          </a:p>
+          <a:p>
+            <a:r>
+              <a:t>Dobré pravidlo mluví o obsahu obrázku (přechody versus hrany a text), ne o programu nebo o zvyku.</a:t>
             </a:r>
           </a:p>
           <a:p/>
@@ -943,7 +943,7 @@
           </a:p>
           <a:p>
             <a:r>
-              <a:t>Vyplněné Formáty a komprese.csv a vlastní pravidlo pro výběr formátu.</a:t>
+              <a:t>Vyplněné Formáty a komprese.csv a vlastní pravidlo pro výběr formátu.</a:t>
             </a:r>
           </a:p>
           <a:p/>
@@ -954,7 +954,7 @@
           </a:p>
           <a:p>
             <a:r>
-              <a:t>Vynech řádky s GIF a WebP. Jádro hodiny je dvojice JPEG a PNG na dvou různých motivech.</a:t>
+              <a:t>Vynech řádky s GIF a WebP. Jádro hodiny je dvojice JPEG a PNG na dvou různých motivech.</a:t>
             </a:r>
           </a:p>
         </p:txBody>
@@ -1035,7 +1035,7 @@
           </a:p>
           <a:p>
             <a:r>
-              <a:t>„Než odevzdáte, projedeme čtyři věci. Odškrtávejte si je.“ Čti body nahlas a mezi nimi nech pauzu.</a:t>
+              <a:t>„Než odevzdáte, projedeme čtyři věci. Odškrtávejte si je.“ Čti body nahlas a mezi nimi nech pauzu.</a:t>
             </a:r>
           </a:p>
           <a:p/>
@@ -1046,7 +1046,7 @@
           </a:p>
           <a:p>
             <a:r>
-              <a:t>Sloupec „ztrátová“ v CSV bývá nedodělaný u řádků s GIF. GIF je bezztrátový, ale má jen 256 barev — ztráta vzniká už při převodu barev, ne kompresí. Když se na to někdo zeptá, je to dobrá otázka a stojí za minutu.</a:t>
+              <a:t>Sloupec „ztrátová“ v CSV bývá nedodělaný u řádků s GIF. GIF je bezztrátový, ale má jen 256 barev — ztráta vzniká už při převodu barev, ne kompresí. Když se na to někdo zeptá, je to dobrá otázka a stojí za minutu.</a:t>
             </a:r>
           </a:p>
           <a:p/>
@@ -1143,7 +1143,7 @@
           </a:p>
           <a:p>
             <a:r>
-              <a:t>Pak nech studenty vyslovit čtyři závěry ze snímku a doplň jen to, co nezazní.</a:t>
+              <a:t>Pak nech studenty vyslovit čtyři závěry ze snímku a doplň jen to, co nezazní.</a:t>
             </a:r>
           </a:p>
           <a:p/>
@@ -1164,7 +1164,7 @@
           </a:p>
           <a:p>
             <a:r>
-              <a:t>Plošná grafika: PNG nebo SVG. Ostré hrany ztrátová komprese poškodí a soubor ještě zvětší.</a:t>
+              <a:t>Plošná grafika: PNG nebo SVG. Ostré hrany ztrátová komprese poškodí a soubor ještě zvětší.</a:t>
             </a:r>
           </a:p>
           <a:p>
@@ -1180,7 +1180,7 @@
           </a:p>
           <a:p>
             <a:r>
-              <a:t>Hodnoť postup a zdůvodnění, ne shodu s jednou formulací.</a:t>
+              <a:t>Hodnoť postup a zdůvodnění, ne shodu s jednou formulací.</a:t>
             </a:r>
           </a:p>
         </p:txBody>
@@ -1261,7 +1261,7 @@
           </a:p>
           <a:p>
             <a:r>
-              <a:t>„Každý sám. Jmenuj jeden obrázek, který uložíš jako JPEG, a jeden jako PNG, a u obou napiš proč.“</a:t>
+              <a:t>„Každý sám. Jmenuj jeden obrázek, který uložíš jako JPEG, a jeden jako PNG, a u obou napiš proč.“</a:t>
             </a:r>
           </a:p>
           <a:p/>
@@ -1272,7 +1272,7 @@
           </a:p>
           <a:p>
             <a:r>
-              <a:t>Sbírej u dveří. Odpověď bez zdůvodnění se nepočítá — celá hodina byla o tom „proč“.</a:t>
+              <a:t>Sbírej u dveří. Odpověď bez zdůvodnění se nepočítá — celá hodina byla o tom „proč“.</a:t>
             </a:r>
           </a:p>
           <a:p/>
@@ -1283,12 +1283,12 @@
           </a:p>
           <a:p>
             <a:r>
-              <a:t>JPEG pro fotografii s plynulými přechody. PNG pro snímek obrazovky, logo, text nebo obrázek s průhledností.</a:t>
-            </a:r>
-          </a:p>
-          <a:p>
-            <a:r>
-              <a:t>Snímek obrazovky je nejlepší odpověď, jakou můžeš dostat: má ostrý text i plochy a v JPEGu se rozmaže nejvíc.</a:t>
+              <a:t>JPEG pro fotografii s plynulými přechody. PNG pro snímek obrazovky, logo, text nebo obrázek s průhledností.</a:t>
+            </a:r>
+          </a:p>
+          <a:p>
+            <a:r>
+              <a:t>Snímek obrazovky je nejlepší odpověď, jakou můžeš dostat: má ostrý text i plochy a v JPEGu se rozmaže nejvíc.</a:t>
             </a:r>
           </a:p>
         </p:txBody>
@@ -4486,7 +4486,7 @@
                 </a:solidFill>
                 <a:latin typeface="Calibri"/>
               </a:rPr>
-              <a:t>Formáty obrázků a komprese dat</a:t>
+              <a:t>Formáty obrázků a komprese dat</a:t>
             </a:r>
           </a:p>
         </p:txBody>
@@ -4525,7 +4525,7 @@
                 </a:solidFill>
                 <a:latin typeface="Calibri"/>
               </a:rPr>
-              <a:t>Student vysvětlí rozdíl mezi ztrátovou a bezztrátovou kompresí a vybere formát podle obsahu a účelu.</a:t>
+              <a:t>Student vysvětlí rozdíl mezi ztrátovou a bezztrátovou kompresí a vybere formát podle obsahu a účelu.</a:t>
             </a:r>
           </a:p>
         </p:txBody>
@@ -4850,7 +4850,7 @@
                 </a:solidFill>
                 <a:latin typeface="Calibri"/>
               </a:rPr>
-              <a:t>POČÍTAČOVÁ GRAFIKA A PRÁCE S MULTIMÉDII</a:t>
+              <a:t>POČÍTAČOVÁ GRAFIKA A PRÁCE S MULTIMÉDII</a:t>
             </a:r>
           </a:p>
         </p:txBody>
@@ -4924,7 +4924,7 @@
                 </a:solidFill>
                 <a:latin typeface="Calibri"/>
               </a:rPr>
-              <a:t>Který soubor bude menší: fotografie jako PNG, nebo jako JPEG? A co logo?</a:t>
+              <a:t>Který soubor bude menší: fotografie jako PNG, nebo jako JPEG? A co logo?</a:t>
             </a:r>
           </a:p>
         </p:txBody>
@@ -5033,7 +5033,7 @@
                 </a:solidFill>
                 <a:latin typeface="Calibri"/>
               </a:rPr>
-              <a:t>OVĚŘ V LABORATOŘI</a:t>
+              <a:t>OVĚŘ V LABORATOŘI</a:t>
             </a:r>
           </a:p>
         </p:txBody>
@@ -5072,7 +5072,7 @@
                 </a:solidFill>
                 <a:latin typeface="Calibri"/>
               </a:rPr>
-              <a:t>Porovnej s tabulkou v modulu 03.</a:t>
+              <a:t>Porovnej s tabulkou v modulu 03.</a:t>
             </a:r>
           </a:p>
         </p:txBody>
@@ -5146,7 +5146,7 @@
                 </a:solidFill>
                 <a:latin typeface="Calibri"/>
               </a:rPr>
-              <a:t>Proč to u loga dopadlo jinak?</a:t>
+              <a:t>Proč to u loga dopadlo jinak?</a:t>
             </a:r>
           </a:p>
         </p:txBody>
@@ -5392,7 +5392,7 @@
                 </a:solidFill>
                 <a:latin typeface="Calibri"/>
               </a:rPr>
-              <a:t>POČÍTAČOVÁ GRAFIKA A PRÁCE S MULTIMÉDII</a:t>
+              <a:t>POČÍTAČOVÁ GRAFIKA A PRÁCE S MULTIMÉDII</a:t>
             </a:r>
           </a:p>
         </p:txBody>
@@ -5580,7 +5580,7 @@
                 </a:solidFill>
                 <a:latin typeface="Calibri"/>
               </a:rPr>
-              <a:t>PNG, GIF, SVG. Po rozbalení vznikne přesně původní data. Vhodná na ostré hrany a text.</a:t>
+              <a:t>PNG, GIF, SVG. Po rozbalení vznikne přesně původní data. Vhodná na ostré hrany a text.</a:t>
             </a:r>
           </a:p>
         </p:txBody>
@@ -5886,7 +5886,7 @@
                 </a:solidFill>
                 <a:latin typeface="Calibri"/>
               </a:rPr>
-              <a:t>Formát se nevybírá podle zvyku, ale podle toho, co je na obrázku a k čemu poslouží.</a:t>
+              <a:t>Formát se nevybírá podle zvyku, ale podle toho, co je na obrázku a k čemu poslouží.</a:t>
             </a:r>
           </a:p>
         </p:txBody>
@@ -5965,7 +5965,7 @@
                 </a:solidFill>
                 <a:latin typeface="Calibri"/>
               </a:rPr>
-              <a:t>U loga je JPEG téměř 8× větší než PNG — a vypadá hůř.</a:t>
+              <a:t>U loga je JPEG téměř 8× větší než PNG — a vypadá hůř.</a:t>
             </a:r>
           </a:p>
         </p:txBody>
@@ -6176,7 +6176,7 @@
                 </a:solidFill>
                 <a:latin typeface="Calibri"/>
               </a:rPr>
-              <a:t>POČÍTAČOVÁ GRAFIKA A PRÁCE S MULTIMÉDII</a:t>
+              <a:t>POČÍTAČOVÁ GRAFIKA A PRÁCE S MULTIMÉDII</a:t>
             </a:r>
           </a:p>
         </p:txBody>
@@ -6281,7 +6281,7 @@
                 </a:solidFill>
                 <a:latin typeface="Calibri"/>
               </a:rPr>
-              <a:t>Laboratoř – komprese a formáty.html, Formáty a komprese.csv</a:t>
+              <a:t>Laboratoř – komprese a formáty.html, Formáty a komprese.csv</a:t>
             </a:r>
           </a:p>
         </p:txBody>
@@ -6390,7 +6390,7 @@
                 </a:solidFill>
                 <a:latin typeface="Calibri"/>
               </a:rPr>
-              <a:t>Přepínej kvalitu JPEG 95 → 15 a sleduj výřez i velikost souboru.</a:t>
+              <a:t>Přepínej kvalitu JPEG 95 → 15 a sleduj výřez i velikost souboru.</a:t>
             </a:r>
           </a:p>
         </p:txBody>
@@ -6608,7 +6608,7 @@
                 </a:solidFill>
                 <a:latin typeface="Calibri"/>
               </a:rPr>
-              <a:t>U každého souboru urči, zda je ztrátový, a napiš vhodné použití.</a:t>
+              <a:t>U každého souboru urči, zda je ztrátový, a napiš vhodné použití.</a:t>
             </a:r>
           </a:p>
         </p:txBody>
@@ -6722,7 +6722,7 @@
                 </a:solidFill>
                 <a:latin typeface="Calibri"/>
               </a:rPr>
-              <a:t>Vyplněné Formáty a komprese.csv a vlastní pravidlo pro výběr formátu.</a:t>
+              <a:t>Vyplněné Formáty a komprese.csv a vlastní pravidlo pro výběr formátu.</a:t>
             </a:r>
           </a:p>
         </p:txBody>
@@ -6933,7 +6933,7 @@
                 </a:solidFill>
                 <a:latin typeface="Calibri"/>
               </a:rPr>
-              <a:t>POČÍTAČOVÁ GRAFIKA A PRÁCE S MULTIMÉDII</a:t>
+              <a:t>POČÍTAČOVÁ GRAFIKA A PRÁCE S MULTIMÉDII</a:t>
             </a:r>
           </a:p>
         </p:txBody>
@@ -7042,7 +7042,7 @@
                 </a:solidFill>
                 <a:latin typeface="Calibri"/>
               </a:rPr>
-              <a:t>V CSV máš vyplněný sloupec ztrátová u všech řádků.</a:t>
+              <a:t>V CSV máš vyplněný sloupec ztrátová u všech řádků.</a:t>
             </a:r>
           </a:p>
         </p:txBody>
@@ -7396,7 +7396,7 @@
                 </a:solidFill>
                 <a:latin typeface="Calibri"/>
               </a:rPr>
-              <a:t>Co si z hodiny odnést</a:t>
+              <a:t>Co si z hodiny odnést</a:t>
             </a:r>
           </a:p>
         </p:txBody>
@@ -7475,7 +7475,7 @@
                 </a:solidFill>
                 <a:latin typeface="Calibri"/>
               </a:rPr>
-              <a:t>POČÍTAČOVÁ GRAFIKA A PRÁCE S MULTIMÉDII</a:t>
+              <a:t>POČÍTAČOVÁ GRAFIKA A PRÁCE S MULTIMÉDII</a:t>
             </a:r>
           </a:p>
         </p:txBody>
@@ -7820,7 +7820,7 @@
                 </a:solidFill>
                 <a:latin typeface="Calibri"/>
               </a:rPr>
-              <a:t>PNG nebo SVG. Ostré hrany ztrátová komprese poškodí a soubor zvětší.</a:t>
+              <a:t>PNG nebo SVG. Ostré hrany ztrátová komprese poškodí a soubor zvětší.</a:t>
             </a:r>
           </a:p>
         </p:txBody>
@@ -8079,7 +8079,7 @@
                 </a:solidFill>
                 <a:latin typeface="Calibri"/>
               </a:rPr>
-              <a:t>POČÍTAČOVÁ GRAFIKA A PRÁCE S MULTIMÉDII</a:t>
+              <a:t>POČÍTAČOVÁ GRAFIKA A PRÁCE S MULTIMÉDII</a:t>
             </a:r>
           </a:p>
         </p:txBody>
@@ -8188,7 +8188,7 @@
                 </a:solidFill>
                 <a:latin typeface="Calibri"/>
               </a:rPr>
-              <a:t>Uveď jeden obrázek, který uložíš jako JPEG, a jeden, který uložíš jako PNG. U obou napiš proč.</a:t>
+              <a:t>Uveď jeden obrázek, který uložíš jako JPEG, a jeden, který uložíš jako PNG. U obou napiš proč.</a:t>
             </a:r>
           </a:p>
         </p:txBody>
@@ -8302,7 +8302,7 @@
                 </a:solidFill>
                 <a:latin typeface="Calibri"/>
               </a:rPr>
-              <a:t>JPEG pro fotografii s přechody, PNG pro snímek obrazovky, logo, text nebo obrázek s průhledností.</a:t>
+              <a:t>JPEG pro fotografii s přechody, PNG pro snímek obrazovky, logo, text nebo obrázek s průhledností.</a:t>
             </a:r>
           </a:p>
         </p:txBody>
